--- a/Презентация.pptx
+++ b/Презентация.pptx
@@ -8,6 +8,10 @@
     <p:sldId id="256" r:id="rId2"/>
     <p:sldId id="257" r:id="rId3"/>
     <p:sldId id="258" r:id="rId4"/>
+    <p:sldId id="259" r:id="rId5"/>
+    <p:sldId id="260" r:id="rId6"/>
+    <p:sldId id="261" r:id="rId7"/>
+    <p:sldId id="262" r:id="rId8"/>
   </p:sldIdLst>
   <p:sldSz cx="12192000" cy="6858000"/>
   <p:notesSz cx="6858000" cy="9144000"/>
@@ -106,6 +110,11 @@
       </a:defRPr>
     </a:lvl9pPr>
   </p:defaultTextStyle>
+  <p:extLst>
+    <p:ext uri="{EFAFB233-063F-42B5-8137-9DF3F51BA10A}">
+      <p15:sldGuideLst xmlns:p15="http://schemas.microsoft.com/office/powerpoint/2012/main"/>
+    </p:ext>
+  </p:extLst>
 </p:presentation>
 </file>
 
@@ -258,7 +267,7 @@
           <a:p>
             <a:fld id="{67854724-C07D-4D1E-AC79-DB81C521E982}" type="datetimeFigureOut">
               <a:rPr lang="ru-BY" smtClean="0"/>
-              <a:t>07.05.2026</a:t>
+              <a:t>11.05.2026</a:t>
             </a:fld>
             <a:endParaRPr lang="ru-BY"/>
           </a:p>
@@ -458,7 +467,7 @@
           <a:p>
             <a:fld id="{67854724-C07D-4D1E-AC79-DB81C521E982}" type="datetimeFigureOut">
               <a:rPr lang="ru-BY" smtClean="0"/>
-              <a:t>07.05.2026</a:t>
+              <a:t>11.05.2026</a:t>
             </a:fld>
             <a:endParaRPr lang="ru-BY"/>
           </a:p>
@@ -668,7 +677,7 @@
           <a:p>
             <a:fld id="{67854724-C07D-4D1E-AC79-DB81C521E982}" type="datetimeFigureOut">
               <a:rPr lang="ru-BY" smtClean="0"/>
-              <a:t>07.05.2026</a:t>
+              <a:t>11.05.2026</a:t>
             </a:fld>
             <a:endParaRPr lang="ru-BY"/>
           </a:p>
@@ -868,7 +877,7 @@
           <a:p>
             <a:fld id="{67854724-C07D-4D1E-AC79-DB81C521E982}" type="datetimeFigureOut">
               <a:rPr lang="ru-BY" smtClean="0"/>
-              <a:t>07.05.2026</a:t>
+              <a:t>11.05.2026</a:t>
             </a:fld>
             <a:endParaRPr lang="ru-BY"/>
           </a:p>
@@ -1144,7 +1153,7 @@
           <a:p>
             <a:fld id="{67854724-C07D-4D1E-AC79-DB81C521E982}" type="datetimeFigureOut">
               <a:rPr lang="ru-BY" smtClean="0"/>
-              <a:t>07.05.2026</a:t>
+              <a:t>11.05.2026</a:t>
             </a:fld>
             <a:endParaRPr lang="ru-BY"/>
           </a:p>
@@ -1412,7 +1421,7 @@
           <a:p>
             <a:fld id="{67854724-C07D-4D1E-AC79-DB81C521E982}" type="datetimeFigureOut">
               <a:rPr lang="ru-BY" smtClean="0"/>
-              <a:t>07.05.2026</a:t>
+              <a:t>11.05.2026</a:t>
             </a:fld>
             <a:endParaRPr lang="ru-BY"/>
           </a:p>
@@ -1827,7 +1836,7 @@
           <a:p>
             <a:fld id="{67854724-C07D-4D1E-AC79-DB81C521E982}" type="datetimeFigureOut">
               <a:rPr lang="ru-BY" smtClean="0"/>
-              <a:t>07.05.2026</a:t>
+              <a:t>11.05.2026</a:t>
             </a:fld>
             <a:endParaRPr lang="ru-BY"/>
           </a:p>
@@ -1969,7 +1978,7 @@
           <a:p>
             <a:fld id="{67854724-C07D-4D1E-AC79-DB81C521E982}" type="datetimeFigureOut">
               <a:rPr lang="ru-BY" smtClean="0"/>
-              <a:t>07.05.2026</a:t>
+              <a:t>11.05.2026</a:t>
             </a:fld>
             <a:endParaRPr lang="ru-BY"/>
           </a:p>
@@ -2082,7 +2091,7 @@
           <a:p>
             <a:fld id="{67854724-C07D-4D1E-AC79-DB81C521E982}" type="datetimeFigureOut">
               <a:rPr lang="ru-BY" smtClean="0"/>
-              <a:t>07.05.2026</a:t>
+              <a:t>11.05.2026</a:t>
             </a:fld>
             <a:endParaRPr lang="ru-BY"/>
           </a:p>
@@ -2395,7 +2404,7 @@
           <a:p>
             <a:fld id="{67854724-C07D-4D1E-AC79-DB81C521E982}" type="datetimeFigureOut">
               <a:rPr lang="ru-BY" smtClean="0"/>
-              <a:t>07.05.2026</a:t>
+              <a:t>11.05.2026</a:t>
             </a:fld>
             <a:endParaRPr lang="ru-BY"/>
           </a:p>
@@ -2684,7 +2693,7 @@
           <a:p>
             <a:fld id="{67854724-C07D-4D1E-AC79-DB81C521E982}" type="datetimeFigureOut">
               <a:rPr lang="ru-BY" smtClean="0"/>
-              <a:t>07.05.2026</a:t>
+              <a:t>11.05.2026</a:t>
             </a:fld>
             <a:endParaRPr lang="ru-BY"/>
           </a:p>
@@ -2927,7 +2936,7 @@
           <a:p>
             <a:fld id="{67854724-C07D-4D1E-AC79-DB81C521E982}" type="datetimeFigureOut">
               <a:rPr lang="ru-BY" smtClean="0"/>
-              <a:t>07.05.2026</a:t>
+              <a:t>11.05.2026</a:t>
             </a:fld>
             <a:endParaRPr lang="ru-BY"/>
           </a:p>
@@ -3362,8 +3371,8 @@
         </p:nvSpPr>
         <p:spPr>
           <a:xfrm>
-            <a:off x="1524000" y="2431758"/>
-            <a:ext cx="9144000" cy="1994483"/>
+            <a:off x="1" y="2582704"/>
+            <a:ext cx="12191999" cy="1692592"/>
           </a:xfrm>
         </p:spPr>
         <p:txBody>
@@ -3373,7 +3382,7 @@
           <a:lstStyle/>
           <a:p>
             <a:r>
-              <a:rPr lang="ru-RU" sz="3600" u="none" strike="noStrike" baseline="0" dirty="0">
+              <a:rPr lang="ru-RU" sz="4000" u="none" strike="noStrike" baseline="0" dirty="0">
                 <a:solidFill>
                   <a:srgbClr val="000000"/>
                 </a:solidFill>
@@ -3383,7 +3392,7 @@
               <a:t>Телематическая система мониторинга с поддержкой </a:t>
             </a:r>
             <a:r>
-              <a:rPr lang="ru-RU" sz="3600" u="none" strike="noStrike" baseline="0" dirty="0" err="1">
+              <a:rPr lang="ru-RU" sz="4000" u="none" strike="noStrike" baseline="0" dirty="0" err="1">
                 <a:solidFill>
                   <a:srgbClr val="000000"/>
                 </a:solidFill>
@@ -3393,7 +3402,7 @@
               <a:t>нейросетевых</a:t>
             </a:r>
             <a:r>
-              <a:rPr lang="ru-RU" sz="3600" u="none" strike="noStrike" baseline="0" dirty="0">
+              <a:rPr lang="ru-RU" sz="4000" u="none" strike="noStrike" baseline="0" dirty="0">
                 <a:solidFill>
                   <a:srgbClr val="000000"/>
                 </a:solidFill>
@@ -3402,7 +3411,7 @@
               </a:rPr>
               <a:t> алгоритмов прогнозирования технического обслуживания</a:t>
             </a:r>
-            <a:endParaRPr lang="ru-BY" sz="3600" dirty="0">
+            <a:endParaRPr lang="ru-BY" sz="4000" dirty="0">
               <a:latin typeface="Arial" panose="020B0604020202020204" pitchFamily="34" charset="0"/>
               <a:cs typeface="Arial" panose="020B0604020202020204" pitchFamily="34" charset="0"/>
             </a:endParaRPr>
@@ -3423,8 +3432,8 @@
         </p:nvSpPr>
         <p:spPr>
           <a:xfrm>
-            <a:off x="1201024" y="1166447"/>
-            <a:ext cx="9789952" cy="369332"/>
+            <a:off x="0" y="1135562"/>
+            <a:ext cx="12192000" cy="400110"/>
           </a:xfrm>
           <a:prstGeom prst="rect">
             <a:avLst/>
@@ -3439,10 +3448,10 @@
           <a:p>
             <a:pPr algn="ctr"/>
             <a:r>
-              <a:rPr lang="ru-RU" dirty="0"/>
+              <a:rPr lang="ru-RU" sz="2000" dirty="0"/>
               <a:t>Белорусский государственный университет информатики и радиоэлектроники</a:t>
             </a:r>
-            <a:endParaRPr lang="ru-BY" dirty="0"/>
+            <a:endParaRPr lang="ru-BY" sz="2000" dirty="0"/>
           </a:p>
         </p:txBody>
       </p:sp>
@@ -3460,8 +3469,8 @@
         </p:nvSpPr>
         <p:spPr>
           <a:xfrm>
-            <a:off x="1201024" y="5322328"/>
-            <a:ext cx="3790426" cy="646331"/>
+            <a:off x="1201025" y="5322327"/>
+            <a:ext cx="3790426" cy="707886"/>
           </a:xfrm>
           <a:prstGeom prst="rect">
             <a:avLst/>
@@ -3475,16 +3484,16 @@
           <a:lstStyle/>
           <a:p>
             <a:r>
-              <a:rPr lang="ru-RU" dirty="0"/>
+              <a:rPr lang="ru-RU" sz="2000" dirty="0"/>
               <a:t>Автор:</a:t>
             </a:r>
           </a:p>
           <a:p>
             <a:r>
-              <a:rPr lang="ru-RU" dirty="0"/>
+              <a:rPr lang="ru-RU" sz="2000" dirty="0"/>
               <a:t>Шершнева Е.С.</a:t>
             </a:r>
-            <a:endParaRPr lang="ru-BY" dirty="0"/>
+            <a:endParaRPr lang="ru-BY" sz="2000" dirty="0"/>
           </a:p>
         </p:txBody>
       </p:sp>
@@ -3503,7 +3512,7 @@
         <p:spPr>
           <a:xfrm>
             <a:off x="7200550" y="5322327"/>
-            <a:ext cx="3790426" cy="646331"/>
+            <a:ext cx="3790426" cy="707886"/>
           </a:xfrm>
           <a:prstGeom prst="rect">
             <a:avLst/>
@@ -3518,17 +3527,17 @@
           <a:p>
             <a:pPr algn="r"/>
             <a:r>
-              <a:rPr lang="ru-RU" dirty="0"/>
+              <a:rPr lang="ru-RU" sz="2000" dirty="0"/>
               <a:t>Руководитель:</a:t>
             </a:r>
           </a:p>
           <a:p>
             <a:pPr algn="r"/>
             <a:r>
-              <a:rPr lang="ru-RU" dirty="0"/>
+              <a:rPr lang="ru-RU" sz="2000" dirty="0"/>
               <a:t>Богдан Е.В.</a:t>
             </a:r>
-            <a:endParaRPr lang="ru-BY" dirty="0"/>
+            <a:endParaRPr lang="ru-BY" sz="2000" dirty="0"/>
           </a:p>
         </p:txBody>
       </p:sp>
@@ -3577,7 +3586,7 @@
         <p:spPr>
           <a:xfrm>
             <a:off x="687896" y="822121"/>
-            <a:ext cx="8086987" cy="769441"/>
+            <a:ext cx="8086987" cy="707886"/>
           </a:xfrm>
           <a:prstGeom prst="rect">
             <a:avLst/>
@@ -3591,13 +3600,13 @@
           <a:lstStyle/>
           <a:p>
             <a:r>
-              <a:rPr lang="ru-RU" sz="4400" dirty="0">
+              <a:rPr lang="ru-RU" sz="4000" dirty="0">
                 <a:latin typeface="Arial" panose="020B0604020202020204" pitchFamily="34" charset="0"/>
                 <a:cs typeface="Arial" panose="020B0604020202020204" pitchFamily="34" charset="0"/>
               </a:rPr>
               <a:t>1 Цели и задачи</a:t>
             </a:r>
-            <a:endParaRPr lang="ru-BY" sz="4400" dirty="0">
+            <a:endParaRPr lang="ru-BY" sz="4000" dirty="0">
               <a:latin typeface="Arial" panose="020B0604020202020204" pitchFamily="34" charset="0"/>
               <a:cs typeface="Arial" panose="020B0604020202020204" pitchFamily="34" charset="0"/>
             </a:endParaRPr>
@@ -4013,7 +4022,7 @@
         <p:spPr>
           <a:xfrm>
             <a:off x="687896" y="822121"/>
-            <a:ext cx="8086987" cy="769441"/>
+            <a:ext cx="8086987" cy="707886"/>
           </a:xfrm>
           <a:prstGeom prst="rect">
             <a:avLst/>
@@ -4027,13 +4036,13 @@
           <a:lstStyle/>
           <a:p>
             <a:r>
-              <a:rPr lang="ru-RU" sz="4400" dirty="0">
+              <a:rPr lang="ru-RU" sz="4000" dirty="0">
                 <a:latin typeface="Arial" panose="020B0604020202020204" pitchFamily="34" charset="0"/>
                 <a:cs typeface="Arial" panose="020B0604020202020204" pitchFamily="34" charset="0"/>
               </a:rPr>
               <a:t>2 Используемые технологии</a:t>
             </a:r>
-            <a:endParaRPr lang="ru-BY" sz="4400" dirty="0">
+            <a:endParaRPr lang="ru-BY" sz="4000" dirty="0">
               <a:latin typeface="Arial" panose="020B0604020202020204" pitchFamily="34" charset="0"/>
               <a:cs typeface="Arial" panose="020B0604020202020204" pitchFamily="34" charset="0"/>
             </a:endParaRPr>
@@ -4340,6 +4349,1368 @@
     <p:extLst>
       <p:ext uri="{BB962C8B-B14F-4D97-AF65-F5344CB8AC3E}">
         <p14:creationId xmlns:p14="http://schemas.microsoft.com/office/powerpoint/2010/main" val="3496066584"/>
+      </p:ext>
+    </p:extLst>
+  </p:cSld>
+  <p:clrMapOvr>
+    <a:masterClrMapping/>
+  </p:clrMapOvr>
+</p:sld>
+</file>
+
+<file path=ppt/slides/slide4.xml><?xml version="1.0" encoding="utf-8"?>
+<p:sld xmlns:a="http://schemas.openxmlformats.org/drawingml/2006/main" xmlns:r="http://schemas.openxmlformats.org/officeDocument/2006/relationships" xmlns:p="http://schemas.openxmlformats.org/presentationml/2006/main">
+  <p:cSld>
+    <p:spTree>
+      <p:nvGrpSpPr>
+        <p:cNvPr id="1" name=""/>
+        <p:cNvGrpSpPr/>
+        <p:nvPr/>
+      </p:nvGrpSpPr>
+      <p:grpSpPr>
+        <a:xfrm>
+          <a:off x="0" y="0"/>
+          <a:ext cx="0" cy="0"/>
+          <a:chOff x="0" y="0"/>
+          <a:chExt cx="0" cy="0"/>
+        </a:xfrm>
+      </p:grpSpPr>
+      <p:sp>
+        <p:nvSpPr>
+          <p:cNvPr id="4" name="TextBox 3">
+            <a:extLst>
+              <a:ext uri="{FF2B5EF4-FFF2-40B4-BE49-F238E27FC236}">
+                <a16:creationId xmlns:a16="http://schemas.microsoft.com/office/drawing/2014/main" id="{28EE644F-FD5D-4650-8EA5-B5BA95F08166}"/>
+              </a:ext>
+            </a:extLst>
+          </p:cNvPr>
+          <p:cNvSpPr txBox="1"/>
+          <p:nvPr/>
+        </p:nvSpPr>
+        <p:spPr>
+          <a:xfrm>
+            <a:off x="687896" y="822121"/>
+            <a:ext cx="8086987" cy="707886"/>
+          </a:xfrm>
+          <a:prstGeom prst="rect">
+            <a:avLst/>
+          </a:prstGeom>
+          <a:noFill/>
+        </p:spPr>
+        <p:txBody>
+          <a:bodyPr wrap="square" rtlCol="0">
+            <a:spAutoFit/>
+          </a:bodyPr>
+          <a:lstStyle/>
+          <a:p>
+            <a:r>
+              <a:rPr lang="ru-RU" sz="4000" dirty="0">
+                <a:latin typeface="Arial" panose="020B0604020202020204" pitchFamily="34" charset="0"/>
+                <a:cs typeface="Arial" panose="020B0604020202020204" pitchFamily="34" charset="0"/>
+              </a:rPr>
+              <a:t>3 Архитектура модели нейросети</a:t>
+            </a:r>
+            <a:endParaRPr lang="ru-BY" sz="4000" dirty="0">
+              <a:latin typeface="Arial" panose="020B0604020202020204" pitchFamily="34" charset="0"/>
+              <a:cs typeface="Arial" panose="020B0604020202020204" pitchFamily="34" charset="0"/>
+            </a:endParaRPr>
+          </a:p>
+        </p:txBody>
+      </p:sp>
+      <p:sp>
+        <p:nvSpPr>
+          <p:cNvPr id="5" name="TextBox 4">
+            <a:extLst>
+              <a:ext uri="{FF2B5EF4-FFF2-40B4-BE49-F238E27FC236}">
+                <a16:creationId xmlns:a16="http://schemas.microsoft.com/office/drawing/2014/main" id="{917928C1-0E46-4BBE-BB99-E838C0DA2AD7}"/>
+              </a:ext>
+            </a:extLst>
+          </p:cNvPr>
+          <p:cNvSpPr txBox="1"/>
+          <p:nvPr/>
+        </p:nvSpPr>
+        <p:spPr>
+          <a:xfrm>
+            <a:off x="866163" y="1697787"/>
+            <a:ext cx="4211275" cy="1015663"/>
+          </a:xfrm>
+          <a:prstGeom prst="rect">
+            <a:avLst/>
+          </a:prstGeom>
+          <a:noFill/>
+        </p:spPr>
+        <p:txBody>
+          <a:bodyPr wrap="square">
+            <a:spAutoFit/>
+          </a:bodyPr>
+          <a:lstStyle/>
+          <a:p>
+            <a:pPr algn="l"/>
+            <a:r>
+              <a:rPr lang="ru-BY" sz="2000" b="1" i="0" u="none" strike="noStrike" dirty="0">
+                <a:effectLst/>
+                <a:latin typeface="VKSansDisplay"/>
+              </a:rPr>
+              <a:t>–</a:t>
+            </a:r>
+            <a:r>
+              <a:rPr lang="ru-BY" sz="2000" b="1" i="0" u="none" strike="noStrike" dirty="0">
+                <a:solidFill>
+                  <a:srgbClr val="E7E8EA"/>
+                </a:solidFill>
+                <a:effectLst/>
+                <a:latin typeface="VKSansDisplay"/>
+              </a:rPr>
+              <a:t> </a:t>
+            </a:r>
+            <a:r>
+              <a:rPr lang="ru-RU" sz="2000" b="1" i="0" u="none" strike="noStrike" dirty="0">
+                <a:solidFill>
+                  <a:srgbClr val="E7E8EA"/>
+                </a:solidFill>
+                <a:effectLst/>
+                <a:latin typeface="VKSansDisplay"/>
+              </a:rPr>
+              <a:t> </a:t>
+            </a:r>
+            <a:r>
+              <a:rPr lang="ru-RU" sz="2000" b="1" i="0" dirty="0" err="1">
+                <a:effectLst/>
+                <a:latin typeface="Arial" panose="020B0604020202020204" pitchFamily="34" charset="0"/>
+              </a:rPr>
+              <a:t>Stacked</a:t>
+            </a:r>
+            <a:r>
+              <a:rPr lang="ru-RU" sz="2000" b="1" i="0" dirty="0">
+                <a:effectLst/>
+                <a:latin typeface="Arial" panose="020B0604020202020204" pitchFamily="34" charset="0"/>
+              </a:rPr>
+              <a:t> LSTM </a:t>
+            </a:r>
+            <a:r>
+              <a:rPr lang="ru-RU" sz="2000" b="1" i="0" dirty="0" err="1">
+                <a:effectLst/>
+                <a:latin typeface="Arial" panose="020B0604020202020204" pitchFamily="34" charset="0"/>
+              </a:rPr>
+              <a:t>Autoencoder</a:t>
+            </a:r>
+            <a:endParaRPr lang="ru-RU" sz="2000" b="0" i="0" dirty="0">
+              <a:effectLst/>
+              <a:latin typeface="Arial" panose="020B0604020202020204" pitchFamily="34" charset="0"/>
+            </a:endParaRPr>
+          </a:p>
+          <a:p>
+            <a:pPr algn="l"/>
+            <a:r>
+              <a:rPr lang="ru-RU" sz="2000" b="0" i="0" dirty="0">
+                <a:effectLst/>
+                <a:latin typeface="Arial" panose="020B0604020202020204" pitchFamily="34" charset="0"/>
+              </a:rPr>
+              <a:t>глубокое извлечение иерархических признаков;</a:t>
+            </a:r>
+          </a:p>
+        </p:txBody>
+      </p:sp>
+      <p:sp>
+        <p:nvSpPr>
+          <p:cNvPr id="9" name="TextBox 8">
+            <a:extLst>
+              <a:ext uri="{FF2B5EF4-FFF2-40B4-BE49-F238E27FC236}">
+                <a16:creationId xmlns:a16="http://schemas.microsoft.com/office/drawing/2014/main" id="{209C8CA2-795D-4ECE-823E-58BDEF6E6BAA}"/>
+              </a:ext>
+            </a:extLst>
+          </p:cNvPr>
+          <p:cNvSpPr txBox="1"/>
+          <p:nvPr/>
+        </p:nvSpPr>
+        <p:spPr>
+          <a:xfrm>
+            <a:off x="855677" y="4929664"/>
+            <a:ext cx="8907009" cy="707886"/>
+          </a:xfrm>
+          <a:prstGeom prst="rect">
+            <a:avLst/>
+          </a:prstGeom>
+          <a:noFill/>
+        </p:spPr>
+        <p:txBody>
+          <a:bodyPr wrap="square" rtlCol="0">
+            <a:spAutoFit/>
+          </a:bodyPr>
+          <a:lstStyle/>
+          <a:p>
+            <a:r>
+              <a:rPr lang="ru-BY" sz="2000" b="1" i="0" u="none" strike="noStrike" dirty="0">
+                <a:effectLst/>
+                <a:latin typeface="VKSansDisplay"/>
+              </a:rPr>
+              <a:t>–</a:t>
+            </a:r>
+            <a:r>
+              <a:rPr lang="ru-BY" sz="2000" b="1" i="0" u="none" strike="noStrike" dirty="0">
+                <a:solidFill>
+                  <a:srgbClr val="E7E8EA"/>
+                </a:solidFill>
+                <a:effectLst/>
+                <a:latin typeface="VKSansDisplay"/>
+              </a:rPr>
+              <a:t> </a:t>
+            </a:r>
+            <a:r>
+              <a:rPr lang="ru-RU" sz="2000" b="1" i="0" u="none" strike="noStrike" dirty="0">
+                <a:solidFill>
+                  <a:srgbClr val="E7E8EA"/>
+                </a:solidFill>
+                <a:effectLst/>
+                <a:latin typeface="VKSansDisplay"/>
+              </a:rPr>
+              <a:t> </a:t>
+            </a:r>
+            <a:r>
+              <a:rPr lang="ru-RU" sz="2000" b="1" i="0" dirty="0">
+                <a:effectLst/>
+                <a:latin typeface="Arial" panose="020B0604020202020204" pitchFamily="34" charset="0"/>
+              </a:rPr>
+              <a:t>Механизм внимания</a:t>
+            </a:r>
+          </a:p>
+          <a:p>
+            <a:r>
+              <a:rPr lang="ru-RU" sz="2000" b="0" i="0" dirty="0">
+                <a:effectLst/>
+                <a:latin typeface="Arial" panose="020B0604020202020204" pitchFamily="34" charset="0"/>
+              </a:rPr>
+              <a:t>сохранение контекста временных шагов и весовая фокусировка;</a:t>
+            </a:r>
+          </a:p>
+        </p:txBody>
+      </p:sp>
+      <p:sp>
+        <p:nvSpPr>
+          <p:cNvPr id="10" name="TextBox 9">
+            <a:extLst>
+              <a:ext uri="{FF2B5EF4-FFF2-40B4-BE49-F238E27FC236}">
+                <a16:creationId xmlns:a16="http://schemas.microsoft.com/office/drawing/2014/main" id="{4D2B8EC0-5D02-494D-9E98-A2483A2AC81B}"/>
+              </a:ext>
+            </a:extLst>
+          </p:cNvPr>
+          <p:cNvSpPr txBox="1"/>
+          <p:nvPr/>
+        </p:nvSpPr>
+        <p:spPr>
+          <a:xfrm>
+            <a:off x="876645" y="2980264"/>
+            <a:ext cx="8886041" cy="707886"/>
+          </a:xfrm>
+          <a:prstGeom prst="rect">
+            <a:avLst/>
+          </a:prstGeom>
+          <a:noFill/>
+        </p:spPr>
+        <p:txBody>
+          <a:bodyPr wrap="square" rtlCol="0">
+            <a:spAutoFit/>
+          </a:bodyPr>
+          <a:lstStyle/>
+          <a:p>
+            <a:pPr algn="l"/>
+            <a:r>
+              <a:rPr lang="ru-BY" sz="2000" b="1" i="0" u="none" strike="noStrike" dirty="0">
+                <a:effectLst/>
+                <a:latin typeface="VKSansDisplay"/>
+              </a:rPr>
+              <a:t>–</a:t>
+            </a:r>
+            <a:r>
+              <a:rPr lang="ru-BY" sz="2000" b="1" i="0" u="none" strike="noStrike" dirty="0">
+                <a:solidFill>
+                  <a:srgbClr val="E7E8EA"/>
+                </a:solidFill>
+                <a:effectLst/>
+                <a:latin typeface="VKSansDisplay"/>
+              </a:rPr>
+              <a:t> </a:t>
+            </a:r>
+            <a:r>
+              <a:rPr lang="ru-RU" sz="2000" b="1" i="0" u="none" strike="noStrike" dirty="0">
+                <a:solidFill>
+                  <a:srgbClr val="E7E8EA"/>
+                </a:solidFill>
+                <a:effectLst/>
+                <a:latin typeface="VKSansDisplay"/>
+              </a:rPr>
+              <a:t> </a:t>
+            </a:r>
+            <a:r>
+              <a:rPr lang="ru-RU" sz="2000" b="1" i="0" dirty="0">
+                <a:effectLst/>
+                <a:latin typeface="Arial" panose="020B0604020202020204" pitchFamily="34" charset="0"/>
+              </a:rPr>
+              <a:t>Сжатие (</a:t>
+            </a:r>
+            <a:r>
+              <a:rPr lang="ru-RU" sz="2000" b="1" i="0" dirty="0" err="1">
+                <a:effectLst/>
+                <a:latin typeface="Arial" panose="020B0604020202020204" pitchFamily="34" charset="0"/>
+              </a:rPr>
+              <a:t>Encoder</a:t>
+            </a:r>
+            <a:r>
+              <a:rPr lang="ru-RU" sz="2000" b="1" i="0" dirty="0">
+                <a:effectLst/>
+                <a:latin typeface="Arial" panose="020B0604020202020204" pitchFamily="34" charset="0"/>
+              </a:rPr>
+              <a:t>)</a:t>
+            </a:r>
+          </a:p>
+          <a:p>
+            <a:pPr algn="l"/>
+            <a:r>
+              <a:rPr lang="ru-RU" sz="2000" i="0" dirty="0">
+                <a:effectLst/>
+                <a:latin typeface="Arial" panose="020B0604020202020204" pitchFamily="34" charset="0"/>
+              </a:rPr>
+              <a:t>отображение 20 шагов телеметрии в вектор размерностью 64;</a:t>
+            </a:r>
+          </a:p>
+        </p:txBody>
+      </p:sp>
+      <p:sp>
+        <p:nvSpPr>
+          <p:cNvPr id="11" name="TextBox 10">
+            <a:extLst>
+              <a:ext uri="{FF2B5EF4-FFF2-40B4-BE49-F238E27FC236}">
+                <a16:creationId xmlns:a16="http://schemas.microsoft.com/office/drawing/2014/main" id="{F853C3E5-7659-4075-B958-086870987657}"/>
+              </a:ext>
+            </a:extLst>
+          </p:cNvPr>
+          <p:cNvSpPr txBox="1"/>
+          <p:nvPr/>
+        </p:nvSpPr>
+        <p:spPr>
+          <a:xfrm>
+            <a:off x="866162" y="3954964"/>
+            <a:ext cx="8907011" cy="707886"/>
+          </a:xfrm>
+          <a:prstGeom prst="rect">
+            <a:avLst/>
+          </a:prstGeom>
+          <a:noFill/>
+        </p:spPr>
+        <p:txBody>
+          <a:bodyPr wrap="square" rtlCol="0">
+            <a:spAutoFit/>
+          </a:bodyPr>
+          <a:lstStyle/>
+          <a:p>
+            <a:pPr algn="l"/>
+            <a:r>
+              <a:rPr lang="ru-BY" sz="2000" b="1" i="0" u="none" strike="noStrike" dirty="0">
+                <a:effectLst/>
+                <a:latin typeface="VKSansDisplay"/>
+              </a:rPr>
+              <a:t>–</a:t>
+            </a:r>
+            <a:r>
+              <a:rPr lang="ru-BY" sz="2000" b="1" i="0" u="none" strike="noStrike" dirty="0">
+                <a:solidFill>
+                  <a:srgbClr val="E7E8EA"/>
+                </a:solidFill>
+                <a:effectLst/>
+                <a:latin typeface="VKSansDisplay"/>
+              </a:rPr>
+              <a:t> </a:t>
+            </a:r>
+            <a:r>
+              <a:rPr lang="ru-RU" sz="2000" b="1" i="0" u="none" strike="noStrike" dirty="0">
+                <a:solidFill>
+                  <a:srgbClr val="E7E8EA"/>
+                </a:solidFill>
+                <a:effectLst/>
+                <a:latin typeface="VKSansDisplay"/>
+              </a:rPr>
+              <a:t> </a:t>
+            </a:r>
+            <a:r>
+              <a:rPr lang="ru-RU" sz="2000" b="1" i="0" dirty="0">
+                <a:effectLst/>
+                <a:latin typeface="Arial" panose="020B0604020202020204" pitchFamily="34" charset="0"/>
+              </a:rPr>
+              <a:t>Восстановление (</a:t>
+            </a:r>
+            <a:r>
+              <a:rPr lang="ru-RU" sz="2000" b="1" i="0" dirty="0" err="1">
+                <a:effectLst/>
+                <a:latin typeface="Arial" panose="020B0604020202020204" pitchFamily="34" charset="0"/>
+              </a:rPr>
+              <a:t>Decoder</a:t>
+            </a:r>
+            <a:r>
+              <a:rPr lang="ru-RU" sz="2000" b="1" i="0" dirty="0">
+                <a:effectLst/>
+                <a:latin typeface="Arial" panose="020B0604020202020204" pitchFamily="34" charset="0"/>
+              </a:rPr>
+              <a:t>)</a:t>
+            </a:r>
+          </a:p>
+          <a:p>
+            <a:pPr algn="l"/>
+            <a:r>
+              <a:rPr lang="ru-RU" sz="2000" i="0" dirty="0">
+                <a:effectLst/>
+                <a:latin typeface="Arial" panose="020B0604020202020204" pitchFamily="34" charset="0"/>
+              </a:rPr>
+              <a:t>реконструкция сигнала с использованием механизма внимания;</a:t>
+            </a:r>
+          </a:p>
+        </p:txBody>
+      </p:sp>
+      <p:pic>
+        <p:nvPicPr>
+          <p:cNvPr id="13" name="Рисунок 12">
+            <a:extLst>
+              <a:ext uri="{FF2B5EF4-FFF2-40B4-BE49-F238E27FC236}">
+                <a16:creationId xmlns:a16="http://schemas.microsoft.com/office/drawing/2014/main" id="{6EF80C26-A534-4E32-9281-B6AABBA14D08}"/>
+              </a:ext>
+            </a:extLst>
+          </p:cNvPr>
+          <p:cNvPicPr>
+            <a:picLocks noChangeAspect="1"/>
+          </p:cNvPicPr>
+          <p:nvPr/>
+        </p:nvPicPr>
+        <p:blipFill>
+          <a:blip r:embed="rId2"/>
+          <a:stretch>
+            <a:fillRect/>
+          </a:stretch>
+        </p:blipFill>
+        <p:spPr>
+          <a:xfrm>
+            <a:off x="5519956" y="1531213"/>
+            <a:ext cx="5805881" cy="4680479"/>
+          </a:xfrm>
+          <a:prstGeom prst="rect">
+            <a:avLst/>
+          </a:prstGeom>
+        </p:spPr>
+      </p:pic>
+    </p:spTree>
+    <p:extLst>
+      <p:ext uri="{BB962C8B-B14F-4D97-AF65-F5344CB8AC3E}">
+        <p14:creationId xmlns:p14="http://schemas.microsoft.com/office/powerpoint/2010/main" val="2359637769"/>
+      </p:ext>
+    </p:extLst>
+  </p:cSld>
+  <p:clrMapOvr>
+    <a:masterClrMapping/>
+  </p:clrMapOvr>
+</p:sld>
+</file>
+
+<file path=ppt/slides/slide5.xml><?xml version="1.0" encoding="utf-8"?>
+<p:sld xmlns:a="http://schemas.openxmlformats.org/drawingml/2006/main" xmlns:r="http://schemas.openxmlformats.org/officeDocument/2006/relationships" xmlns:p="http://schemas.openxmlformats.org/presentationml/2006/main">
+  <p:cSld>
+    <p:spTree>
+      <p:nvGrpSpPr>
+        <p:cNvPr id="1" name=""/>
+        <p:cNvGrpSpPr/>
+        <p:nvPr/>
+      </p:nvGrpSpPr>
+      <p:grpSpPr>
+        <a:xfrm>
+          <a:off x="0" y="0"/>
+          <a:ext cx="0" cy="0"/>
+          <a:chOff x="0" y="0"/>
+          <a:chExt cx="0" cy="0"/>
+        </a:xfrm>
+      </p:grpSpPr>
+      <p:pic>
+        <p:nvPicPr>
+          <p:cNvPr id="2" name="Рисунок 1">
+            <a:extLst>
+              <a:ext uri="{FF2B5EF4-FFF2-40B4-BE49-F238E27FC236}">
+                <a16:creationId xmlns:a16="http://schemas.microsoft.com/office/drawing/2014/main" id="{B0E3E07B-018F-4CC7-860D-CF09447C8AFC}"/>
+              </a:ext>
+            </a:extLst>
+          </p:cNvPr>
+          <p:cNvPicPr>
+            <a:picLocks noChangeAspect="1"/>
+          </p:cNvPicPr>
+          <p:nvPr/>
+        </p:nvPicPr>
+        <p:blipFill rotWithShape="1">
+          <a:blip r:embed="rId2"/>
+          <a:srcRect l="5999" t="11228" r="9543" b="7766"/>
+          <a:stretch/>
+        </p:blipFill>
+        <p:spPr>
+          <a:xfrm>
+            <a:off x="687896" y="1752217"/>
+            <a:ext cx="6333689" cy="4086251"/>
+          </a:xfrm>
+          <a:prstGeom prst="rect">
+            <a:avLst/>
+          </a:prstGeom>
+        </p:spPr>
+      </p:pic>
+      <p:sp>
+        <p:nvSpPr>
+          <p:cNvPr id="3" name="TextBox 2">
+            <a:extLst>
+              <a:ext uri="{FF2B5EF4-FFF2-40B4-BE49-F238E27FC236}">
+                <a16:creationId xmlns:a16="http://schemas.microsoft.com/office/drawing/2014/main" id="{B2BACACA-FBD0-4FAC-A026-94369DA46181}"/>
+              </a:ext>
+            </a:extLst>
+          </p:cNvPr>
+          <p:cNvSpPr txBox="1"/>
+          <p:nvPr/>
+        </p:nvSpPr>
+        <p:spPr>
+          <a:xfrm>
+            <a:off x="687896" y="822121"/>
+            <a:ext cx="8086987" cy="707886"/>
+          </a:xfrm>
+          <a:prstGeom prst="rect">
+            <a:avLst/>
+          </a:prstGeom>
+          <a:noFill/>
+        </p:spPr>
+        <p:txBody>
+          <a:bodyPr wrap="square" rtlCol="0">
+            <a:spAutoFit/>
+          </a:bodyPr>
+          <a:lstStyle/>
+          <a:p>
+            <a:r>
+              <a:rPr lang="ru-RU" sz="4000" dirty="0">
+                <a:latin typeface="Arial" panose="020B0604020202020204" pitchFamily="34" charset="0"/>
+                <a:cs typeface="Arial" panose="020B0604020202020204" pitchFamily="34" charset="0"/>
+              </a:rPr>
+              <a:t>4 Обучение модели</a:t>
+            </a:r>
+            <a:endParaRPr lang="ru-BY" sz="4000" dirty="0">
+              <a:latin typeface="Arial" panose="020B0604020202020204" pitchFamily="34" charset="0"/>
+              <a:cs typeface="Arial" panose="020B0604020202020204" pitchFamily="34" charset="0"/>
+            </a:endParaRPr>
+          </a:p>
+        </p:txBody>
+      </p:sp>
+      <p:sp>
+        <p:nvSpPr>
+          <p:cNvPr id="4" name="TextBox 3">
+            <a:extLst>
+              <a:ext uri="{FF2B5EF4-FFF2-40B4-BE49-F238E27FC236}">
+                <a16:creationId xmlns:a16="http://schemas.microsoft.com/office/drawing/2014/main" id="{CD745073-ED80-4870-84DD-610306A21448}"/>
+              </a:ext>
+            </a:extLst>
+          </p:cNvPr>
+          <p:cNvSpPr txBox="1"/>
+          <p:nvPr/>
+        </p:nvSpPr>
+        <p:spPr>
+          <a:xfrm>
+            <a:off x="7326387" y="1394685"/>
+            <a:ext cx="4177717" cy="4247317"/>
+          </a:xfrm>
+          <a:prstGeom prst="rect">
+            <a:avLst/>
+          </a:prstGeom>
+          <a:noFill/>
+        </p:spPr>
+        <p:txBody>
+          <a:bodyPr wrap="square" rtlCol="0">
+            <a:spAutoFit/>
+          </a:bodyPr>
+          <a:lstStyle/>
+          <a:p>
+            <a:r>
+              <a:rPr lang="ru-BY" sz="1800" b="1" i="0" u="none" strike="noStrike" dirty="0">
+                <a:effectLst/>
+                <a:latin typeface="VKSansDisplay"/>
+              </a:rPr>
+              <a:t>–</a:t>
+            </a:r>
+            <a:r>
+              <a:rPr lang="ru-BY" sz="1800" b="1" i="0" u="none" strike="noStrike" dirty="0">
+                <a:solidFill>
+                  <a:srgbClr val="E7E8EA"/>
+                </a:solidFill>
+                <a:effectLst/>
+                <a:latin typeface="VKSansDisplay"/>
+              </a:rPr>
+              <a:t> </a:t>
+            </a:r>
+            <a:r>
+              <a:rPr lang="ru-RU" sz="1800" b="1" i="0" u="none" strike="noStrike" dirty="0">
+                <a:solidFill>
+                  <a:srgbClr val="E7E8EA"/>
+                </a:solidFill>
+                <a:effectLst/>
+                <a:latin typeface="VKSansDisplay"/>
+              </a:rPr>
+              <a:t> </a:t>
+            </a:r>
+            <a:r>
+              <a:rPr lang="ru-RU" dirty="0"/>
+              <a:t>Метод обучения </a:t>
+            </a:r>
+            <a:r>
+              <a:rPr lang="ru-RU" dirty="0" err="1"/>
+              <a:t>Self-supervised</a:t>
+            </a:r>
+            <a:r>
+              <a:rPr lang="ru-RU" dirty="0"/>
+              <a:t> </a:t>
+            </a:r>
+          </a:p>
+          <a:p>
+            <a:r>
+              <a:rPr lang="ru-RU" dirty="0"/>
+              <a:t>на неразмеченном наборе данных</a:t>
+            </a:r>
+          </a:p>
+          <a:p>
+            <a:endParaRPr lang="ru-RU" dirty="0"/>
+          </a:p>
+          <a:p>
+            <a:r>
+              <a:rPr lang="ru-BY" sz="1800" b="1" i="0" u="none" strike="noStrike" dirty="0">
+                <a:effectLst/>
+                <a:latin typeface="VKSansDisplay"/>
+              </a:rPr>
+              <a:t>–</a:t>
+            </a:r>
+            <a:r>
+              <a:rPr lang="ru-BY" sz="1800" b="1" i="0" u="none" strike="noStrike" dirty="0">
+                <a:solidFill>
+                  <a:srgbClr val="E7E8EA"/>
+                </a:solidFill>
+                <a:effectLst/>
+                <a:latin typeface="VKSansDisplay"/>
+              </a:rPr>
+              <a:t> </a:t>
+            </a:r>
+            <a:r>
+              <a:rPr lang="ru-RU" sz="1800" b="1" i="0" u="none" strike="noStrike" dirty="0">
+                <a:solidFill>
+                  <a:srgbClr val="E7E8EA"/>
+                </a:solidFill>
+                <a:effectLst/>
+                <a:latin typeface="VKSansDisplay"/>
+              </a:rPr>
+              <a:t> </a:t>
+            </a:r>
+            <a:r>
+              <a:rPr lang="ru-RU" dirty="0"/>
+              <a:t>Функция потерь </a:t>
+            </a:r>
+            <a:r>
+              <a:rPr lang="ru-RU" dirty="0" err="1"/>
+              <a:t>Mean</a:t>
+            </a:r>
+            <a:r>
+              <a:rPr lang="ru-RU" dirty="0"/>
+              <a:t> </a:t>
+            </a:r>
+            <a:r>
+              <a:rPr lang="ru-RU" dirty="0" err="1"/>
+              <a:t>Absolute</a:t>
+            </a:r>
+            <a:r>
+              <a:rPr lang="ru-RU" dirty="0"/>
+              <a:t> </a:t>
+            </a:r>
+            <a:r>
+              <a:rPr lang="ru-RU" dirty="0" err="1"/>
+              <a:t>Error</a:t>
+            </a:r>
+            <a:r>
+              <a:rPr lang="ru-RU" dirty="0"/>
+              <a:t> </a:t>
+            </a:r>
+          </a:p>
+          <a:p>
+            <a:r>
+              <a:rPr lang="ru-RU" dirty="0"/>
+              <a:t>среднее отклонение восстановленного сигнала от оригинала.</a:t>
+            </a:r>
+          </a:p>
+          <a:p>
+            <a:endParaRPr lang="ru-RU" dirty="0"/>
+          </a:p>
+          <a:p>
+            <a:r>
+              <a:rPr lang="ru-BY" sz="1800" b="1" i="0" u="none" strike="noStrike" dirty="0">
+                <a:effectLst/>
+                <a:latin typeface="VKSansDisplay"/>
+              </a:rPr>
+              <a:t>–</a:t>
+            </a:r>
+            <a:r>
+              <a:rPr lang="ru-BY" sz="1800" b="1" i="0" u="none" strike="noStrike" dirty="0">
+                <a:solidFill>
+                  <a:srgbClr val="E7E8EA"/>
+                </a:solidFill>
+                <a:effectLst/>
+                <a:latin typeface="VKSansDisplay"/>
+              </a:rPr>
+              <a:t> </a:t>
+            </a:r>
+            <a:r>
+              <a:rPr lang="ru-RU" sz="1800" b="1" i="0" u="none" strike="noStrike" dirty="0">
+                <a:solidFill>
+                  <a:srgbClr val="E7E8EA"/>
+                </a:solidFill>
+                <a:effectLst/>
+                <a:latin typeface="VKSansDisplay"/>
+              </a:rPr>
+              <a:t> </a:t>
+            </a:r>
+            <a:r>
+              <a:rPr lang="ru-RU" dirty="0"/>
+              <a:t>Достижение стабильного плато на 130-й эпохе обучения без признаков переобучения.</a:t>
+            </a:r>
+          </a:p>
+          <a:p>
+            <a:endParaRPr lang="ru-RU" dirty="0"/>
+          </a:p>
+          <a:p>
+            <a:r>
+              <a:rPr lang="ru-BY" sz="1800" b="1" i="0" u="none" strike="noStrike" dirty="0">
+                <a:effectLst/>
+                <a:latin typeface="VKSansDisplay"/>
+              </a:rPr>
+              <a:t>–</a:t>
+            </a:r>
+            <a:r>
+              <a:rPr lang="ru-BY" sz="1800" b="1" i="0" u="none" strike="noStrike" dirty="0">
+                <a:solidFill>
+                  <a:srgbClr val="E7E8EA"/>
+                </a:solidFill>
+                <a:effectLst/>
+                <a:latin typeface="VKSansDisplay"/>
+              </a:rPr>
+              <a:t> </a:t>
+            </a:r>
+            <a:r>
+              <a:rPr lang="ru-RU" sz="1800" b="1" i="0" u="none" strike="noStrike" dirty="0">
+                <a:solidFill>
+                  <a:srgbClr val="E7E8EA"/>
+                </a:solidFill>
+                <a:effectLst/>
+                <a:latin typeface="VKSansDisplay"/>
+              </a:rPr>
+              <a:t> </a:t>
+            </a:r>
+            <a:r>
+              <a:rPr lang="ru-RU" dirty="0"/>
+              <a:t>Использование 15% контрольной выборки для подтверждения обобщающей способности модели на новых данных телеметрии.</a:t>
+            </a:r>
+            <a:endParaRPr lang="ru-BY" dirty="0"/>
+          </a:p>
+        </p:txBody>
+      </p:sp>
+    </p:spTree>
+    <p:extLst>
+      <p:ext uri="{BB962C8B-B14F-4D97-AF65-F5344CB8AC3E}">
+        <p14:creationId xmlns:p14="http://schemas.microsoft.com/office/powerpoint/2010/main" val="3971936196"/>
+      </p:ext>
+    </p:extLst>
+  </p:cSld>
+  <p:clrMapOvr>
+    <a:masterClrMapping/>
+  </p:clrMapOvr>
+</p:sld>
+</file>
+
+<file path=ppt/slides/slide6.xml><?xml version="1.0" encoding="utf-8"?>
+<p:sld xmlns:a="http://schemas.openxmlformats.org/drawingml/2006/main" xmlns:r="http://schemas.openxmlformats.org/officeDocument/2006/relationships" xmlns:p="http://schemas.openxmlformats.org/presentationml/2006/main">
+  <p:cSld>
+    <p:spTree>
+      <p:nvGrpSpPr>
+        <p:cNvPr id="1" name=""/>
+        <p:cNvGrpSpPr/>
+        <p:nvPr/>
+      </p:nvGrpSpPr>
+      <p:grpSpPr>
+        <a:xfrm>
+          <a:off x="0" y="0"/>
+          <a:ext cx="0" cy="0"/>
+          <a:chOff x="0" y="0"/>
+          <a:chExt cx="0" cy="0"/>
+        </a:xfrm>
+      </p:grpSpPr>
+      <p:sp>
+        <p:nvSpPr>
+          <p:cNvPr id="2" name="TextBox 1">
+            <a:extLst>
+              <a:ext uri="{FF2B5EF4-FFF2-40B4-BE49-F238E27FC236}">
+                <a16:creationId xmlns:a16="http://schemas.microsoft.com/office/drawing/2014/main" id="{CB9EFEBD-DB0B-46A3-B4C5-6C965CD476E0}"/>
+              </a:ext>
+            </a:extLst>
+          </p:cNvPr>
+          <p:cNvSpPr txBox="1"/>
+          <p:nvPr/>
+        </p:nvSpPr>
+        <p:spPr>
+          <a:xfrm>
+            <a:off x="687896" y="822121"/>
+            <a:ext cx="8086987" cy="707886"/>
+          </a:xfrm>
+          <a:prstGeom prst="rect">
+            <a:avLst/>
+          </a:prstGeom>
+          <a:noFill/>
+        </p:spPr>
+        <p:txBody>
+          <a:bodyPr wrap="square" rtlCol="0">
+            <a:spAutoFit/>
+          </a:bodyPr>
+          <a:lstStyle/>
+          <a:p>
+            <a:r>
+              <a:rPr lang="ru-RU" sz="4000" dirty="0">
+                <a:latin typeface="Arial" panose="020B0604020202020204" pitchFamily="34" charset="0"/>
+                <a:cs typeface="Arial" panose="020B0604020202020204" pitchFamily="34" charset="0"/>
+              </a:rPr>
+              <a:t>5 Демонстрация работы</a:t>
+            </a:r>
+            <a:endParaRPr lang="ru-BY" sz="4000" dirty="0">
+              <a:latin typeface="Arial" panose="020B0604020202020204" pitchFamily="34" charset="0"/>
+              <a:cs typeface="Arial" panose="020B0604020202020204" pitchFamily="34" charset="0"/>
+            </a:endParaRPr>
+          </a:p>
+        </p:txBody>
+      </p:sp>
+    </p:spTree>
+    <p:extLst>
+      <p:ext uri="{BB962C8B-B14F-4D97-AF65-F5344CB8AC3E}">
+        <p14:creationId xmlns:p14="http://schemas.microsoft.com/office/powerpoint/2010/main" val="4249493276"/>
+      </p:ext>
+    </p:extLst>
+  </p:cSld>
+  <p:clrMapOvr>
+    <a:masterClrMapping/>
+  </p:clrMapOvr>
+</p:sld>
+</file>
+
+<file path=ppt/slides/slide7.xml><?xml version="1.0" encoding="utf-8"?>
+<p:sld xmlns:a="http://schemas.openxmlformats.org/drawingml/2006/main" xmlns:r="http://schemas.openxmlformats.org/officeDocument/2006/relationships" xmlns:p="http://schemas.openxmlformats.org/presentationml/2006/main">
+  <p:cSld>
+    <p:spTree>
+      <p:nvGrpSpPr>
+        <p:cNvPr id="1" name=""/>
+        <p:cNvGrpSpPr/>
+        <p:nvPr/>
+      </p:nvGrpSpPr>
+      <p:grpSpPr>
+        <a:xfrm>
+          <a:off x="0" y="0"/>
+          <a:ext cx="0" cy="0"/>
+          <a:chOff x="0" y="0"/>
+          <a:chExt cx="0" cy="0"/>
+        </a:xfrm>
+      </p:grpSpPr>
+      <p:sp>
+        <p:nvSpPr>
+          <p:cNvPr id="2" name="TextBox 1">
+            <a:extLst>
+              <a:ext uri="{FF2B5EF4-FFF2-40B4-BE49-F238E27FC236}">
+                <a16:creationId xmlns:a16="http://schemas.microsoft.com/office/drawing/2014/main" id="{ABB645A9-F3CC-47E1-B8E2-910CA404B71A}"/>
+              </a:ext>
+            </a:extLst>
+          </p:cNvPr>
+          <p:cNvSpPr txBox="1"/>
+          <p:nvPr/>
+        </p:nvSpPr>
+        <p:spPr>
+          <a:xfrm>
+            <a:off x="687896" y="1843950"/>
+            <a:ext cx="10816208" cy="2246769"/>
+          </a:xfrm>
+          <a:prstGeom prst="rect">
+            <a:avLst/>
+          </a:prstGeom>
+          <a:noFill/>
+        </p:spPr>
+        <p:txBody>
+          <a:bodyPr wrap="square" rtlCol="0">
+            <a:spAutoFit/>
+          </a:bodyPr>
+          <a:lstStyle/>
+          <a:p>
+            <a:r>
+              <a:rPr lang="ru-RU" sz="2000" b="1" dirty="0">
+                <a:latin typeface="Arial" panose="020B0604020202020204" pitchFamily="34" charset="0"/>
+                <a:cs typeface="Arial" panose="020B0604020202020204" pitchFamily="34" charset="0"/>
+              </a:rPr>
+              <a:t>Реализовано:</a:t>
+            </a:r>
+          </a:p>
+          <a:p>
+            <a:r>
+              <a:rPr lang="ru-BY" sz="2000" b="1" i="0" u="none" strike="noStrike" dirty="0">
+                <a:effectLst/>
+                <a:latin typeface="VKSansDisplay"/>
+              </a:rPr>
+              <a:t>–</a:t>
+            </a:r>
+            <a:r>
+              <a:rPr lang="ru-BY" sz="2000" b="1" i="0" u="none" strike="noStrike" dirty="0">
+                <a:solidFill>
+                  <a:srgbClr val="E7E8EA"/>
+                </a:solidFill>
+                <a:effectLst/>
+                <a:latin typeface="VKSansDisplay"/>
+              </a:rPr>
+              <a:t> </a:t>
+            </a:r>
+            <a:r>
+              <a:rPr lang="ru-RU" sz="2000" b="1" i="0" u="none" strike="noStrike" dirty="0">
+                <a:solidFill>
+                  <a:srgbClr val="E7E8EA"/>
+                </a:solidFill>
+                <a:effectLst/>
+                <a:latin typeface="VKSansDisplay"/>
+              </a:rPr>
+              <a:t> </a:t>
+            </a:r>
+            <a:r>
+              <a:rPr lang="ru-RU" sz="2000" dirty="0">
+                <a:latin typeface="Arial" panose="020B0604020202020204" pitchFamily="34" charset="0"/>
+                <a:cs typeface="Arial" panose="020B0604020202020204" pitchFamily="34" charset="0"/>
+              </a:rPr>
+              <a:t>масштабируемая </a:t>
+            </a:r>
+            <a:r>
+              <a:rPr lang="ru-RU" sz="2000" dirty="0" err="1">
+                <a:latin typeface="Arial" panose="020B0604020202020204" pitchFamily="34" charset="0"/>
+                <a:cs typeface="Arial" panose="020B0604020202020204" pitchFamily="34" charset="0"/>
+              </a:rPr>
+              <a:t>микросервисная</a:t>
+            </a:r>
+            <a:r>
+              <a:rPr lang="ru-RU" sz="2000" dirty="0">
+                <a:latin typeface="Arial" panose="020B0604020202020204" pitchFamily="34" charset="0"/>
+                <a:cs typeface="Arial" panose="020B0604020202020204" pitchFamily="34" charset="0"/>
+              </a:rPr>
+              <a:t> архитектура;</a:t>
+            </a:r>
+          </a:p>
+          <a:p>
+            <a:r>
+              <a:rPr lang="ru-BY" sz="2000" b="1" i="0" u="none" strike="noStrike" dirty="0">
+                <a:effectLst/>
+                <a:latin typeface="VKSansDisplay"/>
+              </a:rPr>
+              <a:t>–</a:t>
+            </a:r>
+            <a:r>
+              <a:rPr lang="ru-BY" sz="2000" b="1" i="0" u="none" strike="noStrike" dirty="0">
+                <a:solidFill>
+                  <a:srgbClr val="E7E8EA"/>
+                </a:solidFill>
+                <a:effectLst/>
+                <a:latin typeface="VKSansDisplay"/>
+              </a:rPr>
+              <a:t> </a:t>
+            </a:r>
+            <a:r>
+              <a:rPr lang="ru-RU" sz="2000" b="1" i="0" u="none" strike="noStrike" dirty="0">
+                <a:solidFill>
+                  <a:srgbClr val="E7E8EA"/>
+                </a:solidFill>
+                <a:effectLst/>
+                <a:latin typeface="VKSansDisplay"/>
+              </a:rPr>
+              <a:t> </a:t>
+            </a:r>
+            <a:r>
+              <a:rPr lang="ru-RU" sz="2000" dirty="0">
+                <a:latin typeface="Arial" panose="020B0604020202020204" pitchFamily="34" charset="0"/>
+                <a:cs typeface="Arial" panose="020B0604020202020204" pitchFamily="34" charset="0"/>
+              </a:rPr>
+              <a:t>интеллектуальный модуль обнаружения аномалий;</a:t>
+            </a:r>
+          </a:p>
+          <a:p>
+            <a:r>
+              <a:rPr lang="ru-BY" sz="2000" b="1" i="0" u="none" strike="noStrike" dirty="0">
+                <a:effectLst/>
+                <a:latin typeface="VKSansDisplay"/>
+              </a:rPr>
+              <a:t>–</a:t>
+            </a:r>
+            <a:r>
+              <a:rPr lang="ru-BY" sz="2000" b="1" i="0" u="none" strike="noStrike" dirty="0">
+                <a:solidFill>
+                  <a:srgbClr val="E7E8EA"/>
+                </a:solidFill>
+                <a:effectLst/>
+                <a:latin typeface="VKSansDisplay"/>
+              </a:rPr>
+              <a:t> </a:t>
+            </a:r>
+            <a:r>
+              <a:rPr lang="ru-RU" sz="2000" b="1" i="0" u="none" strike="noStrike" dirty="0">
+                <a:solidFill>
+                  <a:srgbClr val="E7E8EA"/>
+                </a:solidFill>
+                <a:effectLst/>
+                <a:latin typeface="VKSansDisplay"/>
+              </a:rPr>
+              <a:t> </a:t>
+            </a:r>
+            <a:r>
+              <a:rPr lang="ru-RU" sz="2000" dirty="0">
+                <a:latin typeface="Arial" panose="020B0604020202020204" pitchFamily="34" charset="0"/>
+                <a:cs typeface="Arial" panose="020B0604020202020204" pitchFamily="34" charset="0"/>
+              </a:rPr>
+              <a:t>единый веб-интерфейс мониторинга для обновления параметров в реальном времени,</a:t>
+            </a:r>
+          </a:p>
+          <a:p>
+            <a:r>
+              <a:rPr lang="ru-RU" sz="2000" dirty="0">
+                <a:latin typeface="Arial" panose="020B0604020202020204" pitchFamily="34" charset="0"/>
+                <a:cs typeface="Arial" panose="020B0604020202020204" pitchFamily="34" charset="0"/>
+              </a:rPr>
+              <a:t>    визуализацией маршрутов и журналом предиктивных инцидентов;</a:t>
+            </a:r>
+          </a:p>
+          <a:p>
+            <a:r>
+              <a:rPr lang="ru-BY" sz="2000" b="1" i="0" u="none" strike="noStrike" dirty="0">
+                <a:effectLst/>
+                <a:latin typeface="VKSansDisplay"/>
+              </a:rPr>
+              <a:t>–</a:t>
+            </a:r>
+            <a:r>
+              <a:rPr lang="ru-BY" sz="2000" b="1" i="0" u="none" strike="noStrike" dirty="0">
+                <a:solidFill>
+                  <a:srgbClr val="E7E8EA"/>
+                </a:solidFill>
+                <a:effectLst/>
+                <a:latin typeface="VKSansDisplay"/>
+              </a:rPr>
+              <a:t> </a:t>
+            </a:r>
+            <a:r>
+              <a:rPr lang="ru-RU" sz="2000" b="1" i="0" u="none" strike="noStrike" dirty="0">
+                <a:solidFill>
+                  <a:srgbClr val="E7E8EA"/>
+                </a:solidFill>
+                <a:effectLst/>
+                <a:latin typeface="VKSansDisplay"/>
+              </a:rPr>
+              <a:t> </a:t>
+            </a:r>
+            <a:r>
+              <a:rPr lang="ru-RU" sz="2000" dirty="0">
+                <a:latin typeface="Arial" panose="020B0604020202020204" pitchFamily="34" charset="0"/>
+                <a:cs typeface="Arial" panose="020B0604020202020204" pitchFamily="34" charset="0"/>
+              </a:rPr>
+              <a:t>система управления конфигурациями параметров SPN/PGN;</a:t>
+            </a:r>
+          </a:p>
+          <a:p>
+            <a:r>
+              <a:rPr lang="ru-BY" sz="2000" b="1" i="0" u="none" strike="noStrike" dirty="0">
+                <a:effectLst/>
+                <a:latin typeface="VKSansDisplay"/>
+              </a:rPr>
+              <a:t>–</a:t>
+            </a:r>
+            <a:r>
+              <a:rPr lang="ru-BY" sz="2000" b="1" i="0" u="none" strike="noStrike" dirty="0">
+                <a:solidFill>
+                  <a:srgbClr val="E7E8EA"/>
+                </a:solidFill>
+                <a:effectLst/>
+                <a:latin typeface="VKSansDisplay"/>
+              </a:rPr>
+              <a:t> </a:t>
+            </a:r>
+            <a:r>
+              <a:rPr lang="ru-RU" sz="2000" b="1" i="0" u="none" strike="noStrike" dirty="0">
+                <a:solidFill>
+                  <a:srgbClr val="E7E8EA"/>
+                </a:solidFill>
+                <a:effectLst/>
+                <a:latin typeface="VKSansDisplay"/>
+              </a:rPr>
+              <a:t> </a:t>
+            </a:r>
+            <a:r>
+              <a:rPr lang="ru-RU" sz="2000" dirty="0">
+                <a:latin typeface="Arial" panose="020B0604020202020204" pitchFamily="34" charset="0"/>
+                <a:cs typeface="Arial" panose="020B0604020202020204" pitchFamily="34" charset="0"/>
+              </a:rPr>
+              <a:t>хранилища данных: </a:t>
+            </a:r>
+            <a:r>
+              <a:rPr lang="en-US" sz="2000" dirty="0">
+                <a:latin typeface="Arial" panose="020B0604020202020204" pitchFamily="34" charset="0"/>
+                <a:cs typeface="Arial" panose="020B0604020202020204" pitchFamily="34" charset="0"/>
+              </a:rPr>
+              <a:t>PostgreSQL, Redis.</a:t>
+            </a:r>
+            <a:endParaRPr lang="ru-BY" sz="2000" dirty="0">
+              <a:latin typeface="Arial" panose="020B0604020202020204" pitchFamily="34" charset="0"/>
+              <a:cs typeface="Arial" panose="020B0604020202020204" pitchFamily="34" charset="0"/>
+            </a:endParaRPr>
+          </a:p>
+        </p:txBody>
+      </p:sp>
+      <p:sp>
+        <p:nvSpPr>
+          <p:cNvPr id="5" name="TextBox 4">
+            <a:extLst>
+              <a:ext uri="{FF2B5EF4-FFF2-40B4-BE49-F238E27FC236}">
+                <a16:creationId xmlns:a16="http://schemas.microsoft.com/office/drawing/2014/main" id="{1DB79C24-A09D-4060-A7CE-7EF56286115F}"/>
+              </a:ext>
+            </a:extLst>
+          </p:cNvPr>
+          <p:cNvSpPr txBox="1"/>
+          <p:nvPr/>
+        </p:nvSpPr>
+        <p:spPr>
+          <a:xfrm>
+            <a:off x="687896" y="4404663"/>
+            <a:ext cx="10816208" cy="1631216"/>
+          </a:xfrm>
+          <a:prstGeom prst="rect">
+            <a:avLst/>
+          </a:prstGeom>
+          <a:noFill/>
+        </p:spPr>
+        <p:txBody>
+          <a:bodyPr wrap="square" rtlCol="0">
+            <a:spAutoFit/>
+          </a:bodyPr>
+          <a:lstStyle/>
+          <a:p>
+            <a:r>
+              <a:rPr lang="ru-RU" sz="2000" b="1" dirty="0">
+                <a:latin typeface="Arial" panose="020B0604020202020204" pitchFamily="34" charset="0"/>
+                <a:cs typeface="Arial" panose="020B0604020202020204" pitchFamily="34" charset="0"/>
+              </a:rPr>
+              <a:t>Направления дальнейшего развития:</a:t>
+            </a:r>
+          </a:p>
+          <a:p>
+            <a:r>
+              <a:rPr lang="ru-BY" sz="2000" b="1" i="0" u="none" strike="noStrike" dirty="0">
+                <a:effectLst/>
+                <a:latin typeface="VKSansDisplay"/>
+              </a:rPr>
+              <a:t>–</a:t>
+            </a:r>
+            <a:r>
+              <a:rPr lang="ru-BY" sz="2000" b="1" i="0" u="none" strike="noStrike" dirty="0">
+                <a:solidFill>
+                  <a:srgbClr val="E7E8EA"/>
+                </a:solidFill>
+                <a:effectLst/>
+                <a:latin typeface="VKSansDisplay"/>
+              </a:rPr>
+              <a:t> </a:t>
+            </a:r>
+            <a:r>
+              <a:rPr lang="ru-RU" sz="2000" b="1" i="0" u="none" strike="noStrike" dirty="0">
+                <a:solidFill>
+                  <a:srgbClr val="E7E8EA"/>
+                </a:solidFill>
+                <a:effectLst/>
+                <a:latin typeface="VKSansDisplay"/>
+              </a:rPr>
+              <a:t> </a:t>
+            </a:r>
+            <a:r>
+              <a:rPr lang="ru-RU" sz="2000" dirty="0">
+                <a:latin typeface="Arial" panose="020B0604020202020204" pitchFamily="34" charset="0"/>
+                <a:cs typeface="Arial" panose="020B0604020202020204" pitchFamily="34" charset="0"/>
+              </a:rPr>
+              <a:t>оптимизация </a:t>
+            </a:r>
+            <a:r>
+              <a:rPr lang="ru-RU" sz="2000" dirty="0" err="1">
+                <a:latin typeface="Arial" panose="020B0604020202020204" pitchFamily="34" charset="0"/>
+                <a:cs typeface="Arial" panose="020B0604020202020204" pitchFamily="34" charset="0"/>
+              </a:rPr>
+              <a:t>нейросетевой</a:t>
+            </a:r>
+            <a:r>
+              <a:rPr lang="ru-RU" sz="2000" dirty="0">
+                <a:latin typeface="Arial" panose="020B0604020202020204" pitchFamily="34" charset="0"/>
+                <a:cs typeface="Arial" panose="020B0604020202020204" pitchFamily="34" charset="0"/>
+              </a:rPr>
+              <a:t> модели;</a:t>
+            </a:r>
+          </a:p>
+          <a:p>
+            <a:r>
+              <a:rPr lang="ru-BY" sz="2000" b="1" i="0" u="none" strike="noStrike" dirty="0">
+                <a:effectLst/>
+                <a:latin typeface="VKSansDisplay"/>
+              </a:rPr>
+              <a:t>–</a:t>
+            </a:r>
+            <a:r>
+              <a:rPr lang="ru-BY" sz="2000" b="1" i="0" u="none" strike="noStrike" dirty="0">
+                <a:solidFill>
+                  <a:srgbClr val="E7E8EA"/>
+                </a:solidFill>
+                <a:effectLst/>
+                <a:latin typeface="VKSansDisplay"/>
+              </a:rPr>
+              <a:t> </a:t>
+            </a:r>
+            <a:r>
+              <a:rPr lang="ru-RU" sz="2000" b="1" i="0" u="none" strike="noStrike" dirty="0">
+                <a:solidFill>
+                  <a:srgbClr val="E7E8EA"/>
+                </a:solidFill>
+                <a:effectLst/>
+                <a:latin typeface="VKSansDisplay"/>
+              </a:rPr>
+              <a:t> </a:t>
+            </a:r>
+            <a:r>
+              <a:rPr lang="ru-RU" sz="2000" dirty="0">
+                <a:latin typeface="Arial" panose="020B0604020202020204" pitchFamily="34" charset="0"/>
+                <a:cs typeface="Arial" panose="020B0604020202020204" pitchFamily="34" charset="0"/>
+              </a:rPr>
+              <a:t>автоматическая адаптация порогов модели под конкретный экземпляр ТС;</a:t>
+            </a:r>
+          </a:p>
+          <a:p>
+            <a:r>
+              <a:rPr lang="ru-BY" sz="2000" b="1" i="0" u="none" strike="noStrike" dirty="0">
+                <a:effectLst/>
+                <a:latin typeface="VKSansDisplay"/>
+              </a:rPr>
+              <a:t>–</a:t>
+            </a:r>
+            <a:r>
+              <a:rPr lang="ru-BY" sz="2000" b="1" i="0" u="none" strike="noStrike" dirty="0">
+                <a:solidFill>
+                  <a:srgbClr val="E7E8EA"/>
+                </a:solidFill>
+                <a:effectLst/>
+                <a:latin typeface="VKSansDisplay"/>
+              </a:rPr>
+              <a:t> </a:t>
+            </a:r>
+            <a:r>
+              <a:rPr lang="ru-RU" sz="2000" b="1" i="0" u="none" strike="noStrike" dirty="0">
+                <a:solidFill>
+                  <a:srgbClr val="E7E8EA"/>
+                </a:solidFill>
+                <a:effectLst/>
+                <a:latin typeface="VKSansDisplay"/>
+              </a:rPr>
+              <a:t> </a:t>
+            </a:r>
+            <a:r>
+              <a:rPr lang="ru-RU" sz="2000" dirty="0">
+                <a:latin typeface="Arial" panose="020B0604020202020204" pitchFamily="34" charset="0"/>
+                <a:cs typeface="Arial" panose="020B0604020202020204" pitchFamily="34" charset="0"/>
+              </a:rPr>
+              <a:t>внедрение модели нейросети непосредственно на борт автомобиля;</a:t>
+            </a:r>
+          </a:p>
+          <a:p>
+            <a:r>
+              <a:rPr lang="ru-BY" sz="2000" b="1" i="0" u="none" strike="noStrike" dirty="0">
+                <a:effectLst/>
+                <a:latin typeface="VKSansDisplay"/>
+              </a:rPr>
+              <a:t>–</a:t>
+            </a:r>
+            <a:r>
+              <a:rPr lang="ru-BY" sz="2000" b="1" i="0" u="none" strike="noStrike" dirty="0">
+                <a:solidFill>
+                  <a:srgbClr val="E7E8EA"/>
+                </a:solidFill>
+                <a:effectLst/>
+                <a:latin typeface="VKSansDisplay"/>
+              </a:rPr>
+              <a:t> </a:t>
+            </a:r>
+            <a:r>
+              <a:rPr lang="ru-RU" sz="2000" b="1" i="0" u="none" strike="noStrike" dirty="0">
+                <a:solidFill>
+                  <a:srgbClr val="E7E8EA"/>
+                </a:solidFill>
+                <a:effectLst/>
+                <a:latin typeface="VKSansDisplay"/>
+              </a:rPr>
+              <a:t> </a:t>
+            </a:r>
+            <a:r>
+              <a:rPr lang="ru-RU" sz="2000" dirty="0">
+                <a:latin typeface="Arial" panose="020B0604020202020204" pitchFamily="34" charset="0"/>
+                <a:cs typeface="Arial" panose="020B0604020202020204" pitchFamily="34" charset="0"/>
+              </a:rPr>
+              <a:t>добавление поддержки стандартов J1708 и OBD-II.</a:t>
+            </a:r>
+            <a:endParaRPr lang="ru-BY" sz="2000" dirty="0">
+              <a:latin typeface="Arial" panose="020B0604020202020204" pitchFamily="34" charset="0"/>
+              <a:cs typeface="Arial" panose="020B0604020202020204" pitchFamily="34" charset="0"/>
+            </a:endParaRPr>
+          </a:p>
+        </p:txBody>
+      </p:sp>
+      <p:sp>
+        <p:nvSpPr>
+          <p:cNvPr id="6" name="TextBox 5">
+            <a:extLst>
+              <a:ext uri="{FF2B5EF4-FFF2-40B4-BE49-F238E27FC236}">
+                <a16:creationId xmlns:a16="http://schemas.microsoft.com/office/drawing/2014/main" id="{247A5268-AD28-4A1A-A00A-DD153EBD78C0}"/>
+              </a:ext>
+            </a:extLst>
+          </p:cNvPr>
+          <p:cNvSpPr txBox="1"/>
+          <p:nvPr/>
+        </p:nvSpPr>
+        <p:spPr>
+          <a:xfrm>
+            <a:off x="687896" y="822121"/>
+            <a:ext cx="8086987" cy="707886"/>
+          </a:xfrm>
+          <a:prstGeom prst="rect">
+            <a:avLst/>
+          </a:prstGeom>
+          <a:noFill/>
+        </p:spPr>
+        <p:txBody>
+          <a:bodyPr wrap="square" rtlCol="0">
+            <a:spAutoFit/>
+          </a:bodyPr>
+          <a:lstStyle/>
+          <a:p>
+            <a:r>
+              <a:rPr lang="ru-RU" sz="4000" dirty="0">
+                <a:latin typeface="Arial" panose="020B0604020202020204" pitchFamily="34" charset="0"/>
+                <a:cs typeface="Arial" panose="020B0604020202020204" pitchFamily="34" charset="0"/>
+              </a:rPr>
+              <a:t>7 Результаты</a:t>
+            </a:r>
+            <a:endParaRPr lang="ru-BY" sz="4000" dirty="0">
+              <a:latin typeface="Arial" panose="020B0604020202020204" pitchFamily="34" charset="0"/>
+              <a:cs typeface="Arial" panose="020B0604020202020204" pitchFamily="34" charset="0"/>
+            </a:endParaRPr>
+          </a:p>
+        </p:txBody>
+      </p:sp>
+    </p:spTree>
+    <p:extLst>
+      <p:ext uri="{BB962C8B-B14F-4D97-AF65-F5344CB8AC3E}">
+        <p14:creationId xmlns:p14="http://schemas.microsoft.com/office/powerpoint/2010/main" val="2587425913"/>
       </p:ext>
     </p:extLst>
   </p:cSld>
